--- a/KHBD_Tin_học/Lớp_8/Bài_01/Slide_Tin_hoc_Lop_8_Bai01_LƯỢC_SỬ_CÔNG_CỤ_TÍNH_TOÁN.pptx
+++ b/KHBD_Tin_học/Lớp_8/Bài_01/Slide_Tin_hoc_Lop_8_Bai01_LƯỢC_SỬ_CÔNG_CỤ_TÍNH_TOÁN.pptx
@@ -3103,16 +3103,85 @@
         <p:nvPr/>
       </p:nvGrpSpPr>
       <p:grpSpPr/>
-      <p:sp>
-        <p:nvSpPr>
-          <p:cNvPr id="2" name="Rounded Rectangle 1"/>
+      <p:pic>
+        <p:nvPicPr>
+          <p:cNvPr id="2" name="Picture 1" descr="bai1_page11.png"/>
+          <p:cNvPicPr>
+            <a:picLocks noChangeAspect="1"/>
+          </p:cNvPicPr>
+          <p:nvPr/>
+        </p:nvPicPr>
+        <p:blipFill>
+          <a:blip r:embed="rId2"/>
+          <a:stretch>
+            <a:fillRect/>
+          </a:stretch>
+        </p:blipFill>
+        <p:spPr>
+          <a:xfrm>
+            <a:off x="7786558" y="1188720"/>
+            <a:ext cx="3233043" cy="4572000"/>
+          </a:xfrm>
+          <a:prstGeom prst="rect">
+            <a:avLst/>
+          </a:prstGeom>
+        </p:spPr>
+      </p:pic>
+      <p:sp>
+        <p:nvSpPr>
+          <p:cNvPr id="3" name="Rounded Rectangle 2"/>
           <p:cNvSpPr/>
           <p:nvPr/>
         </p:nvSpPr>
         <p:spPr>
           <a:xfrm>
-            <a:off x="1524000" y="1280160"/>
-            <a:ext cx="9144000" cy="4206240"/>
+            <a:off x="6797040" y="1097280"/>
+            <a:ext cx="5212080" cy="4754880"/>
+          </a:xfrm>
+          <a:prstGeom prst="roundRect">
+            <a:avLst>
+              <a:gd name="adj" fmla="val 3000"/>
+            </a:avLst>
+          </a:prstGeom>
+          <a:noFill/>
+          <a:ln w="38100">
+            <a:solidFill>
+              <a:srgbClr val="FFB74D"/>
+            </a:solidFill>
+          </a:ln>
+        </p:spPr>
+        <p:style>
+          <a:lnRef idx="1">
+            <a:schemeClr val="accent1"/>
+          </a:lnRef>
+          <a:fillRef idx="3">
+            <a:schemeClr val="accent1"/>
+          </a:fillRef>
+          <a:effectRef idx="2">
+            <a:schemeClr val="accent1"/>
+          </a:effectRef>
+          <a:fontRef idx="minor">
+            <a:schemeClr val="lt1"/>
+          </a:fontRef>
+        </p:style>
+        <p:txBody>
+          <a:bodyPr rtlCol="0" anchor="ctr"/>
+          <a:lstStyle/>
+          <a:p>
+            <a:pPr algn="ctr"/>
+          </a:p>
+        </p:txBody>
+      </p:sp>
+      <p:sp>
+        <p:nvSpPr>
+          <p:cNvPr id="4" name="Rounded Rectangle 3"/>
+          <p:cNvSpPr/>
+          <p:nvPr/>
+        </p:nvSpPr>
+        <p:spPr>
+          <a:xfrm>
+            <a:off x="365760" y="1280160"/>
+            <a:ext cx="6858000" cy="4206240"/>
           </a:xfrm>
           <a:prstGeom prst="roundRect">
             <a:avLst>
@@ -3150,13 +3219,13 @@
       </p:sp>
       <p:sp>
         <p:nvSpPr>
-          <p:cNvPr id="3" name="Rounded Rectangle 2"/>
+          <p:cNvPr id="5" name="Rounded Rectangle 4"/>
           <p:cNvSpPr/>
           <p:nvPr/>
         </p:nvSpPr>
         <p:spPr>
           <a:xfrm>
-            <a:off x="1981200" y="1554480"/>
+            <a:off x="822960" y="1554480"/>
             <a:ext cx="4114800" cy="457200"/>
           </a:xfrm>
           <a:prstGeom prst="roundRect">
@@ -3204,14 +3273,14 @@
       </p:sp>
       <p:sp>
         <p:nvSpPr>
-          <p:cNvPr id="4" name="TextBox 3"/>
+          <p:cNvPr id="6" name="TextBox 5"/>
           <p:cNvSpPr txBox="1"/>
           <p:nvPr/>
         </p:nvSpPr>
         <p:spPr>
           <a:xfrm>
-            <a:off x="1981200" y="2286000"/>
-            <a:ext cx="8229600" cy="2011680"/>
+            <a:off x="822960" y="2286000"/>
+            <a:ext cx="5943600" cy="2011680"/>
           </a:xfrm>
           <a:prstGeom prst="rect">
             <a:avLst/>
@@ -3270,14 +3339,14 @@
       </p:sp>
       <p:sp>
         <p:nvSpPr>
-          <p:cNvPr id="5" name="TextBox 4"/>
+          <p:cNvPr id="7" name="TextBox 6"/>
           <p:cNvSpPr txBox="1"/>
           <p:nvPr/>
         </p:nvSpPr>
         <p:spPr>
           <a:xfrm>
-            <a:off x="1981200" y="4389120"/>
-            <a:ext cx="8229600" cy="914400"/>
+            <a:off x="822960" y="4389120"/>
+            <a:ext cx="5943600" cy="914400"/>
           </a:xfrm>
           <a:prstGeom prst="rect">
             <a:avLst/>
@@ -3315,7 +3384,7 @@
       </p:sp>
       <p:sp>
         <p:nvSpPr>
-          <p:cNvPr id="6" name="Rectangle 5"/>
+          <p:cNvPr id="8" name="Rectangle 7"/>
           <p:cNvSpPr/>
           <p:nvPr/>
         </p:nvSpPr>
@@ -3358,7 +3427,7 @@
       </p:sp>
       <p:sp>
         <p:nvSpPr>
-          <p:cNvPr id="7" name="TextBox 6"/>
+          <p:cNvPr id="9" name="TextBox 8"/>
           <p:cNvSpPr txBox="1"/>
           <p:nvPr/>
         </p:nvSpPr>
@@ -3425,8 +3494,8 @@
         </p:nvSpPr>
         <p:spPr>
           <a:xfrm>
-            <a:off x="838200" y="1188720"/>
-            <a:ext cx="10515600" cy="4389120"/>
+            <a:off x="320040" y="1188720"/>
+            <a:ext cx="7132320" cy="4389120"/>
           </a:xfrm>
           <a:prstGeom prst="roundRect">
             <a:avLst>
@@ -3477,7 +3546,7 @@
         </p:nvSpPr>
         <p:spPr>
           <a:xfrm>
-            <a:off x="838200" y="1188720"/>
+            <a:off x="320040" y="1188720"/>
             <a:ext cx="109728" cy="4389120"/>
           </a:xfrm>
           <a:prstGeom prst="rect">
@@ -3520,8 +3589,8 @@
         </p:nvSpPr>
         <p:spPr>
           <a:xfrm>
-            <a:off x="1295400" y="1371600"/>
-            <a:ext cx="9144000" cy="457200"/>
+            <a:off x="777240" y="1371600"/>
+            <a:ext cx="6400800" cy="457200"/>
           </a:xfrm>
           <a:prstGeom prst="rect">
             <a:avLst/>
@@ -3556,8 +3625,8 @@
         </p:nvSpPr>
         <p:spPr>
           <a:xfrm>
-            <a:off x="1295400" y="2011680"/>
-            <a:ext cx="9601200" cy="3291840"/>
+            <a:off x="777240" y="2011680"/>
+            <a:ext cx="6400800" cy="3291840"/>
           </a:xfrm>
           <a:prstGeom prst="rect">
             <a:avLst/>
@@ -3655,9 +3724,33 @@
           </a:p>
         </p:txBody>
       </p:sp>
-      <p:sp>
-        <p:nvSpPr>
-          <p:cNvPr id="6" name="Rectangle 5"/>
+      <p:pic>
+        <p:nvPicPr>
+          <p:cNvPr id="6" name="Picture 5" descr="bai1_page11.png"/>
+          <p:cNvPicPr>
+            <a:picLocks noChangeAspect="1"/>
+          </p:cNvPicPr>
+          <p:nvPr/>
+        </p:nvPicPr>
+        <p:blipFill>
+          <a:blip r:embed="rId2"/>
+          <a:stretch>
+            <a:fillRect/>
+          </a:stretch>
+        </p:blipFill>
+        <p:spPr>
+          <a:xfrm>
+            <a:off x="8224599" y="1188720"/>
+            <a:ext cx="3103721" cy="4389120"/>
+          </a:xfrm>
+          <a:prstGeom prst="rect">
+            <a:avLst/>
+          </a:prstGeom>
+        </p:spPr>
+      </p:pic>
+      <p:sp>
+        <p:nvSpPr>
+          <p:cNvPr id="7" name="Rectangle 6"/>
           <p:cNvSpPr/>
           <p:nvPr/>
         </p:nvSpPr>
@@ -3700,7 +3793,7 @@
       </p:sp>
       <p:sp>
         <p:nvSpPr>
-          <p:cNvPr id="7" name="TextBox 6"/>
+          <p:cNvPr id="8" name="TextBox 7"/>
           <p:cNvSpPr txBox="1"/>
           <p:nvPr/>
         </p:nvSpPr>
@@ -3767,8 +3860,8 @@
         </p:nvSpPr>
         <p:spPr>
           <a:xfrm>
-            <a:off x="457200" y="1188720"/>
-            <a:ext cx="6858000" cy="4389120"/>
+            <a:off x="320040" y="1188720"/>
+            <a:ext cx="6400800" cy="4389120"/>
           </a:xfrm>
           <a:prstGeom prst="roundRect">
             <a:avLst>
@@ -3819,7 +3912,7 @@
         </p:nvSpPr>
         <p:spPr>
           <a:xfrm>
-            <a:off x="457200" y="1188720"/>
+            <a:off x="320040" y="1188720"/>
             <a:ext cx="109728" cy="4389120"/>
           </a:xfrm>
           <a:prstGeom prst="rect">
@@ -3862,8 +3955,8 @@
         </p:nvSpPr>
         <p:spPr>
           <a:xfrm>
-            <a:off x="822960" y="1371600"/>
-            <a:ext cx="6126480" cy="457200"/>
+            <a:off x="685800" y="1371600"/>
+            <a:ext cx="5669280" cy="457200"/>
           </a:xfrm>
           <a:prstGeom prst="rect">
             <a:avLst/>
@@ -3898,8 +3991,8 @@
         </p:nvSpPr>
         <p:spPr>
           <a:xfrm>
-            <a:off x="822960" y="2011680"/>
-            <a:ext cx="6126480" cy="3291840"/>
+            <a:off x="685800" y="2011680"/>
+            <a:ext cx="5669280" cy="3291840"/>
           </a:xfrm>
           <a:prstGeom prst="rect">
             <a:avLst/>
@@ -4005,21 +4098,21 @@
         </p:nvSpPr>
         <p:spPr>
           <a:xfrm>
-            <a:off x="7437120" y="1188720"/>
-            <a:ext cx="4389120" cy="4389120"/>
+            <a:off x="6949440" y="1188720"/>
+            <a:ext cx="4922520" cy="4389120"/>
           </a:xfrm>
           <a:prstGeom prst="roundRect">
             <a:avLst>
-              <a:gd name="adj" fmla="val 4000"/>
+              <a:gd name="adj" fmla="val 3000"/>
             </a:avLst>
           </a:prstGeom>
           <a:solidFill>
-            <a:srgbClr val="00797B">
-              <a:alpha val="20000"/>
-            </a:srgbClr>
+            <a:srgbClr val="F8F8F8"/>
           </a:solidFill>
-          <a:ln>
-            <a:noFill/>
+          <a:ln w="19050">
+            <a:solidFill>
+              <a:srgbClr val="00797B"/>
+            </a:solidFill>
           </a:ln>
         </p:spPr>
         <p:style>
@@ -4044,45 +4137,87 @@
           </a:p>
         </p:txBody>
       </p:sp>
-      <p:sp>
-        <p:nvSpPr>
-          <p:cNvPr id="7" name="TextBox 6"/>
-          <p:cNvSpPr txBox="1"/>
+      <p:pic>
+        <p:nvPicPr>
+          <p:cNvPr id="7" name="Picture 6" descr="bai1_page11.png"/>
+          <p:cNvPicPr>
+            <a:picLocks noChangeAspect="1"/>
+          </p:cNvPicPr>
           <p:nvPr/>
-        </p:nvSpPr>
-        <p:spPr>
-          <a:xfrm>
-            <a:off x="9174480" y="2926080"/>
-            <a:ext cx="914400" cy="914400"/>
+        </p:nvPicPr>
+        <p:blipFill>
+          <a:blip r:embed="rId2"/>
+          <a:stretch>
+            <a:fillRect/>
+          </a:stretch>
+        </p:blipFill>
+        <p:spPr>
+          <a:xfrm>
+            <a:off x="7955831" y="1325880"/>
+            <a:ext cx="2909738" cy="4114800"/>
           </a:xfrm>
           <a:prstGeom prst="rect">
             <a:avLst/>
           </a:prstGeom>
-          <a:noFill/>
-        </p:spPr>
-        <p:txBody>
-          <a:bodyPr wrap="square">
-            <a:spAutoFit/>
-          </a:bodyPr>
-          <a:lstStyle/>
-          <a:p>
-            <a:pPr algn="ctr">
-              <a:defRPr sz="4800" b="0">
+        </p:spPr>
+      </p:pic>
+      <p:sp>
+        <p:nvSpPr>
+          <p:cNvPr id="8" name="Rounded Rectangle 7"/>
+          <p:cNvSpPr/>
+          <p:nvPr/>
+        </p:nvSpPr>
+        <p:spPr>
+          <a:xfrm>
+            <a:off x="10683240" y="1280160"/>
+            <a:ext cx="1097280" cy="274320"/>
+          </a:xfrm>
+          <a:prstGeom prst="roundRect">
+            <a:avLst>
+              <a:gd name="adj" fmla="val 30000"/>
+            </a:avLst>
+          </a:prstGeom>
+          <a:solidFill>
+            <a:srgbClr val="00797B"/>
+          </a:solidFill>
+          <a:ln>
+            <a:noFill/>
+          </a:ln>
+        </p:spPr>
+        <p:style>
+          <a:lnRef idx="1">
+            <a:schemeClr val="accent1"/>
+          </a:lnRef>
+          <a:fillRef idx="3">
+            <a:schemeClr val="accent1"/>
+          </a:fillRef>
+          <a:effectRef idx="2">
+            <a:schemeClr val="accent1"/>
+          </a:effectRef>
+          <a:fontRef idx="minor">
+            <a:schemeClr val="lt1"/>
+          </a:fontRef>
+        </p:style>
+        <p:txBody>
+          <a:bodyPr rtlCol="0" anchor="ctr"/>
+          <a:lstStyle/>
+          <a:p>
+            <a:pPr algn="ctr"/>
+            <a:r>
+              <a:rPr sz="1000" b="1">
                 <a:solidFill>
                   <a:srgbClr val="FFFFFF"/>
                 </a:solidFill>
                 <a:latin typeface="Times New Roman"/>
-              </a:defRPr>
-            </a:pPr>
-            <a:r>
-              <a:t>🎮</a:t>
-            </a:r>
-          </a:p>
-        </p:txBody>
-      </p:sp>
-      <p:sp>
-        <p:nvSpPr>
-          <p:cNvPr id="8" name="Rectangle 7"/>
+              </a:rPr>
+              <a:t>📚 SGK</a:t>
+            </a:r>
+          </a:p>
+        </p:txBody>
+      </p:sp>
+      <p:sp>
+        <p:nvSpPr>
+          <p:cNvPr id="9" name="Rectangle 8"/>
           <p:cNvSpPr/>
           <p:nvPr/>
         </p:nvSpPr>
@@ -4125,7 +4260,7 @@
       </p:sp>
       <p:sp>
         <p:nvSpPr>
-          <p:cNvPr id="9" name="TextBox 8"/>
+          <p:cNvPr id="10" name="TextBox 9"/>
           <p:cNvSpPr txBox="1"/>
           <p:nvPr/>
         </p:nvSpPr>
@@ -4192,8 +4327,8 @@
         </p:nvSpPr>
         <p:spPr>
           <a:xfrm>
-            <a:off x="4876800" y="1188720"/>
-            <a:ext cx="6858000" cy="4389120"/>
+            <a:off x="5577840" y="1188720"/>
+            <a:ext cx="6400800" cy="4389120"/>
           </a:xfrm>
           <a:prstGeom prst="roundRect">
             <a:avLst>
@@ -4244,7 +4379,7 @@
         </p:nvSpPr>
         <p:spPr>
           <a:xfrm>
-            <a:off x="11625072" y="1188720"/>
+            <a:off x="11868912" y="1188720"/>
             <a:ext cx="109728" cy="4389120"/>
           </a:xfrm>
           <a:prstGeom prst="rect">
@@ -4287,8 +4422,8 @@
         </p:nvSpPr>
         <p:spPr>
           <a:xfrm>
-            <a:off x="5242560" y="1371600"/>
-            <a:ext cx="6126480" cy="457200"/>
+            <a:off x="5943600" y="1371600"/>
+            <a:ext cx="5669280" cy="457200"/>
           </a:xfrm>
           <a:prstGeom prst="rect">
             <a:avLst/>
@@ -4323,8 +4458,8 @@
         </p:nvSpPr>
         <p:spPr>
           <a:xfrm>
-            <a:off x="5242560" y="2011680"/>
-            <a:ext cx="6126480" cy="3291840"/>
+            <a:off x="5943600" y="2011680"/>
+            <a:ext cx="5669280" cy="3291840"/>
           </a:xfrm>
           <a:prstGeom prst="rect">
             <a:avLst/>
@@ -4430,21 +4565,21 @@
         </p:nvSpPr>
         <p:spPr>
           <a:xfrm>
-            <a:off x="457200" y="1188720"/>
-            <a:ext cx="4389120" cy="4389120"/>
+            <a:off x="320040" y="1188720"/>
+            <a:ext cx="5029200" cy="4389120"/>
           </a:xfrm>
           <a:prstGeom prst="roundRect">
             <a:avLst>
-              <a:gd name="adj" fmla="val 4000"/>
+              <a:gd name="adj" fmla="val 3000"/>
             </a:avLst>
           </a:prstGeom>
           <a:solidFill>
-            <a:srgbClr val="00797B">
-              <a:alpha val="20000"/>
-            </a:srgbClr>
+            <a:srgbClr val="F8F8F8"/>
           </a:solidFill>
-          <a:ln>
-            <a:noFill/>
+          <a:ln w="19050">
+            <a:solidFill>
+              <a:srgbClr val="00797B"/>
+            </a:solidFill>
           </a:ln>
         </p:spPr>
         <p:style>
@@ -4469,45 +4604,87 @@
           </a:p>
         </p:txBody>
       </p:sp>
-      <p:sp>
-        <p:nvSpPr>
-          <p:cNvPr id="7" name="TextBox 6"/>
-          <p:cNvSpPr txBox="1"/>
+      <p:pic>
+        <p:nvPicPr>
+          <p:cNvPr id="7" name="Picture 6" descr="bai1_page12.png"/>
+          <p:cNvPicPr>
+            <a:picLocks noChangeAspect="1"/>
+          </p:cNvPicPr>
           <p:nvPr/>
-        </p:nvSpPr>
-        <p:spPr>
-          <a:xfrm>
-            <a:off x="2194560" y="2926080"/>
-            <a:ext cx="914400" cy="914400"/>
+        </p:nvPicPr>
+        <p:blipFill>
+          <a:blip r:embed="rId2"/>
+          <a:stretch>
+            <a:fillRect/>
+          </a:stretch>
+        </p:blipFill>
+        <p:spPr>
+          <a:xfrm>
+            <a:off x="1379771" y="1325880"/>
+            <a:ext cx="2909738" cy="4114800"/>
           </a:xfrm>
           <a:prstGeom prst="rect">
             <a:avLst/>
           </a:prstGeom>
-          <a:noFill/>
-        </p:spPr>
-        <p:txBody>
-          <a:bodyPr wrap="square">
-            <a:spAutoFit/>
-          </a:bodyPr>
-          <a:lstStyle/>
-          <a:p>
-            <a:pPr algn="ctr">
-              <a:defRPr sz="4800" b="0">
+        </p:spPr>
+      </p:pic>
+      <p:sp>
+        <p:nvSpPr>
+          <p:cNvPr id="8" name="Rounded Rectangle 7"/>
+          <p:cNvSpPr/>
+          <p:nvPr/>
+        </p:nvSpPr>
+        <p:spPr>
+          <a:xfrm>
+            <a:off x="4160520" y="1280160"/>
+            <a:ext cx="1097280" cy="274320"/>
+          </a:xfrm>
+          <a:prstGeom prst="roundRect">
+            <a:avLst>
+              <a:gd name="adj" fmla="val 30000"/>
+            </a:avLst>
+          </a:prstGeom>
+          <a:solidFill>
+            <a:srgbClr val="00797B"/>
+          </a:solidFill>
+          <a:ln>
+            <a:noFill/>
+          </a:ln>
+        </p:spPr>
+        <p:style>
+          <a:lnRef idx="1">
+            <a:schemeClr val="accent1"/>
+          </a:lnRef>
+          <a:fillRef idx="3">
+            <a:schemeClr val="accent1"/>
+          </a:fillRef>
+          <a:effectRef idx="2">
+            <a:schemeClr val="accent1"/>
+          </a:effectRef>
+          <a:fontRef idx="minor">
+            <a:schemeClr val="lt1"/>
+          </a:fontRef>
+        </p:style>
+        <p:txBody>
+          <a:bodyPr rtlCol="0" anchor="ctr"/>
+          <a:lstStyle/>
+          <a:p>
+            <a:pPr algn="ctr"/>
+            <a:r>
+              <a:rPr sz="1000" b="1">
                 <a:solidFill>
                   <a:srgbClr val="FFFFFF"/>
                 </a:solidFill>
                 <a:latin typeface="Times New Roman"/>
-              </a:defRPr>
-            </a:pPr>
-            <a:r>
-              <a:t>📖</a:t>
-            </a:r>
-          </a:p>
-        </p:txBody>
-      </p:sp>
-      <p:sp>
-        <p:nvSpPr>
-          <p:cNvPr id="8" name="Rectangle 7"/>
+              </a:rPr>
+              <a:t>📚 SGK</a:t>
+            </a:r>
+          </a:p>
+        </p:txBody>
+      </p:sp>
+      <p:sp>
+        <p:nvSpPr>
+          <p:cNvPr id="9" name="Rectangle 8"/>
           <p:cNvSpPr/>
           <p:nvPr/>
         </p:nvSpPr>
@@ -4550,7 +4727,7 @@
       </p:sp>
       <p:sp>
         <p:nvSpPr>
-          <p:cNvPr id="9" name="TextBox 8"/>
+          <p:cNvPr id="10" name="TextBox 9"/>
           <p:cNvSpPr txBox="1"/>
           <p:nvPr/>
         </p:nvSpPr>
@@ -4617,8 +4794,8 @@
         </p:nvSpPr>
         <p:spPr>
           <a:xfrm>
-            <a:off x="4876800" y="1188720"/>
-            <a:ext cx="6858000" cy="4389120"/>
+            <a:off x="5577840" y="1188720"/>
+            <a:ext cx="6400800" cy="4389120"/>
           </a:xfrm>
           <a:prstGeom prst="roundRect">
             <a:avLst>
@@ -4669,7 +4846,7 @@
         </p:nvSpPr>
         <p:spPr>
           <a:xfrm>
-            <a:off x="11625072" y="1188720"/>
+            <a:off x="11868912" y="1188720"/>
             <a:ext cx="109728" cy="4389120"/>
           </a:xfrm>
           <a:prstGeom prst="rect">
@@ -4712,8 +4889,8 @@
         </p:nvSpPr>
         <p:spPr>
           <a:xfrm>
-            <a:off x="5242560" y="1371600"/>
-            <a:ext cx="6126480" cy="457200"/>
+            <a:off x="5943600" y="1371600"/>
+            <a:ext cx="5669280" cy="457200"/>
           </a:xfrm>
           <a:prstGeom prst="rect">
             <a:avLst/>
@@ -4748,8 +4925,8 @@
         </p:nvSpPr>
         <p:spPr>
           <a:xfrm>
-            <a:off x="5242560" y="2011680"/>
-            <a:ext cx="6126480" cy="3291840"/>
+            <a:off x="5943600" y="2011680"/>
+            <a:ext cx="5669280" cy="3291840"/>
           </a:xfrm>
           <a:prstGeom prst="rect">
             <a:avLst/>
@@ -4883,21 +5060,21 @@
         </p:nvSpPr>
         <p:spPr>
           <a:xfrm>
-            <a:off x="457200" y="1188720"/>
-            <a:ext cx="4389120" cy="4389120"/>
+            <a:off x="320040" y="1188720"/>
+            <a:ext cx="5029200" cy="4389120"/>
           </a:xfrm>
           <a:prstGeom prst="roundRect">
             <a:avLst>
-              <a:gd name="adj" fmla="val 4000"/>
+              <a:gd name="adj" fmla="val 3000"/>
             </a:avLst>
           </a:prstGeom>
           <a:solidFill>
-            <a:srgbClr val="00797B">
-              <a:alpha val="20000"/>
-            </a:srgbClr>
+            <a:srgbClr val="F8F8F8"/>
           </a:solidFill>
-          <a:ln>
-            <a:noFill/>
+          <a:ln w="19050">
+            <a:solidFill>
+              <a:srgbClr val="00797B"/>
+            </a:solidFill>
           </a:ln>
         </p:spPr>
         <p:style>
@@ -4922,45 +5099,87 @@
           </a:p>
         </p:txBody>
       </p:sp>
-      <p:sp>
-        <p:nvSpPr>
-          <p:cNvPr id="7" name="TextBox 6"/>
-          <p:cNvSpPr txBox="1"/>
+      <p:pic>
+        <p:nvPicPr>
+          <p:cNvPr id="7" name="Picture 6" descr="bai1_page7.png"/>
+          <p:cNvPicPr>
+            <a:picLocks noChangeAspect="1"/>
+          </p:cNvPicPr>
           <p:nvPr/>
-        </p:nvSpPr>
-        <p:spPr>
-          <a:xfrm>
-            <a:off x="2194560" y="2926080"/>
-            <a:ext cx="914400" cy="914400"/>
+        </p:nvPicPr>
+        <p:blipFill>
+          <a:blip r:embed="rId2"/>
+          <a:stretch>
+            <a:fillRect/>
+          </a:stretch>
+        </p:blipFill>
+        <p:spPr>
+          <a:xfrm>
+            <a:off x="1379771" y="1325880"/>
+            <a:ext cx="2909738" cy="4114800"/>
           </a:xfrm>
           <a:prstGeom prst="rect">
             <a:avLst/>
           </a:prstGeom>
-          <a:noFill/>
-        </p:spPr>
-        <p:txBody>
-          <a:bodyPr wrap="square">
-            <a:spAutoFit/>
-          </a:bodyPr>
-          <a:lstStyle/>
-          <a:p>
-            <a:pPr algn="ctr">
-              <a:defRPr sz="4800" b="0">
+        </p:spPr>
+      </p:pic>
+      <p:sp>
+        <p:nvSpPr>
+          <p:cNvPr id="8" name="Rounded Rectangle 7"/>
+          <p:cNvSpPr/>
+          <p:nvPr/>
+        </p:nvSpPr>
+        <p:spPr>
+          <a:xfrm>
+            <a:off x="4160520" y="1280160"/>
+            <a:ext cx="1097280" cy="274320"/>
+          </a:xfrm>
+          <a:prstGeom prst="roundRect">
+            <a:avLst>
+              <a:gd name="adj" fmla="val 30000"/>
+            </a:avLst>
+          </a:prstGeom>
+          <a:solidFill>
+            <a:srgbClr val="00797B"/>
+          </a:solidFill>
+          <a:ln>
+            <a:noFill/>
+          </a:ln>
+        </p:spPr>
+        <p:style>
+          <a:lnRef idx="1">
+            <a:schemeClr val="accent1"/>
+          </a:lnRef>
+          <a:fillRef idx="3">
+            <a:schemeClr val="accent1"/>
+          </a:fillRef>
+          <a:effectRef idx="2">
+            <a:schemeClr val="accent1"/>
+          </a:effectRef>
+          <a:fontRef idx="minor">
+            <a:schemeClr val="lt1"/>
+          </a:fontRef>
+        </p:style>
+        <p:txBody>
+          <a:bodyPr rtlCol="0" anchor="ctr"/>
+          <a:lstStyle/>
+          <a:p>
+            <a:pPr algn="ctr"/>
+            <a:r>
+              <a:rPr sz="1000" b="1">
                 <a:solidFill>
                   <a:srgbClr val="FFFFFF"/>
                 </a:solidFill>
                 <a:latin typeface="Times New Roman"/>
-              </a:defRPr>
-            </a:pPr>
-            <a:r>
-              <a:t>✏️</a:t>
-            </a:r>
-          </a:p>
-        </p:txBody>
-      </p:sp>
-      <p:sp>
-        <p:nvSpPr>
-          <p:cNvPr id="8" name="Rectangle 7"/>
+              </a:rPr>
+              <a:t>📚 SGK</a:t>
+            </a:r>
+          </a:p>
+        </p:txBody>
+      </p:sp>
+      <p:sp>
+        <p:nvSpPr>
+          <p:cNvPr id="9" name="Rectangle 8"/>
           <p:cNvSpPr/>
           <p:nvPr/>
         </p:nvSpPr>
@@ -5003,7 +5222,7 @@
       </p:sp>
       <p:sp>
         <p:nvSpPr>
-          <p:cNvPr id="9" name="TextBox 8"/>
+          <p:cNvPr id="10" name="TextBox 9"/>
           <p:cNvSpPr txBox="1"/>
           <p:nvPr/>
         </p:nvSpPr>
@@ -5070,8 +5289,8 @@
         </p:nvSpPr>
         <p:spPr>
           <a:xfrm>
-            <a:off x="457200" y="1188720"/>
-            <a:ext cx="6858000" cy="4389120"/>
+            <a:off x="320040" y="1188720"/>
+            <a:ext cx="6400800" cy="4389120"/>
           </a:xfrm>
           <a:prstGeom prst="roundRect">
             <a:avLst>
@@ -5122,7 +5341,7 @@
         </p:nvSpPr>
         <p:spPr>
           <a:xfrm>
-            <a:off x="457200" y="1188720"/>
+            <a:off x="320040" y="1188720"/>
             <a:ext cx="109728" cy="4389120"/>
           </a:xfrm>
           <a:prstGeom prst="rect">
@@ -5165,8 +5384,8 @@
         </p:nvSpPr>
         <p:spPr>
           <a:xfrm>
-            <a:off x="822960" y="1371600"/>
-            <a:ext cx="6126480" cy="457200"/>
+            <a:off x="685800" y="1371600"/>
+            <a:ext cx="5669280" cy="457200"/>
           </a:xfrm>
           <a:prstGeom prst="rect">
             <a:avLst/>
@@ -5201,8 +5420,8 @@
         </p:nvSpPr>
         <p:spPr>
           <a:xfrm>
-            <a:off x="822960" y="2011680"/>
-            <a:ext cx="6126480" cy="3291840"/>
+            <a:off x="685800" y="2011680"/>
+            <a:ext cx="5669280" cy="3291840"/>
           </a:xfrm>
           <a:prstGeom prst="rect">
             <a:avLst/>
@@ -5336,21 +5555,21 @@
         </p:nvSpPr>
         <p:spPr>
           <a:xfrm>
-            <a:off x="7437120" y="1188720"/>
-            <a:ext cx="4389120" cy="4389120"/>
+            <a:off x="6949440" y="1188720"/>
+            <a:ext cx="4922520" cy="4389120"/>
           </a:xfrm>
           <a:prstGeom prst="roundRect">
             <a:avLst>
-              <a:gd name="adj" fmla="val 4000"/>
+              <a:gd name="adj" fmla="val 3000"/>
             </a:avLst>
           </a:prstGeom>
           <a:solidFill>
-            <a:srgbClr val="00797B">
-              <a:alpha val="20000"/>
-            </a:srgbClr>
+            <a:srgbClr val="F8F8F8"/>
           </a:solidFill>
-          <a:ln>
-            <a:noFill/>
+          <a:ln w="19050">
+            <a:solidFill>
+              <a:srgbClr val="00797B"/>
+            </a:solidFill>
           </a:ln>
         </p:spPr>
         <p:style>
@@ -5375,45 +5594,87 @@
           </a:p>
         </p:txBody>
       </p:sp>
-      <p:sp>
-        <p:nvSpPr>
-          <p:cNvPr id="7" name="TextBox 6"/>
-          <p:cNvSpPr txBox="1"/>
+      <p:pic>
+        <p:nvPicPr>
+          <p:cNvPr id="7" name="Picture 6" descr="bai1_page8.png"/>
+          <p:cNvPicPr>
+            <a:picLocks noChangeAspect="1"/>
+          </p:cNvPicPr>
           <p:nvPr/>
-        </p:nvSpPr>
-        <p:spPr>
-          <a:xfrm>
-            <a:off x="9174480" y="2926080"/>
-            <a:ext cx="914400" cy="914400"/>
+        </p:nvPicPr>
+        <p:blipFill>
+          <a:blip r:embed="rId2"/>
+          <a:stretch>
+            <a:fillRect/>
+          </a:stretch>
+        </p:blipFill>
+        <p:spPr>
+          <a:xfrm>
+            <a:off x="7955831" y="1325880"/>
+            <a:ext cx="2909738" cy="4114800"/>
           </a:xfrm>
           <a:prstGeom prst="rect">
             <a:avLst/>
           </a:prstGeom>
-          <a:noFill/>
-        </p:spPr>
-        <p:txBody>
-          <a:bodyPr wrap="square">
-            <a:spAutoFit/>
-          </a:bodyPr>
-          <a:lstStyle/>
-          <a:p>
-            <a:pPr algn="ctr">
-              <a:defRPr sz="4800" b="0">
+        </p:spPr>
+      </p:pic>
+      <p:sp>
+        <p:nvSpPr>
+          <p:cNvPr id="8" name="Rounded Rectangle 7"/>
+          <p:cNvSpPr/>
+          <p:nvPr/>
+        </p:nvSpPr>
+        <p:spPr>
+          <a:xfrm>
+            <a:off x="10683240" y="1280160"/>
+            <a:ext cx="1097280" cy="274320"/>
+          </a:xfrm>
+          <a:prstGeom prst="roundRect">
+            <a:avLst>
+              <a:gd name="adj" fmla="val 30000"/>
+            </a:avLst>
+          </a:prstGeom>
+          <a:solidFill>
+            <a:srgbClr val="00797B"/>
+          </a:solidFill>
+          <a:ln>
+            <a:noFill/>
+          </a:ln>
+        </p:spPr>
+        <p:style>
+          <a:lnRef idx="1">
+            <a:schemeClr val="accent1"/>
+          </a:lnRef>
+          <a:fillRef idx="3">
+            <a:schemeClr val="accent1"/>
+          </a:fillRef>
+          <a:effectRef idx="2">
+            <a:schemeClr val="accent1"/>
+          </a:effectRef>
+          <a:fontRef idx="minor">
+            <a:schemeClr val="lt1"/>
+          </a:fontRef>
+        </p:style>
+        <p:txBody>
+          <a:bodyPr rtlCol="0" anchor="ctr"/>
+          <a:lstStyle/>
+          <a:p>
+            <a:pPr algn="ctr"/>
+            <a:r>
+              <a:rPr sz="1000" b="1">
                 <a:solidFill>
                   <a:srgbClr val="FFFFFF"/>
                 </a:solidFill>
                 <a:latin typeface="Times New Roman"/>
-              </a:defRPr>
-            </a:pPr>
-            <a:r>
-              <a:t>🚀</a:t>
-            </a:r>
-          </a:p>
-        </p:txBody>
-      </p:sp>
-      <p:sp>
-        <p:nvSpPr>
-          <p:cNvPr id="8" name="Rectangle 7"/>
+              </a:rPr>
+              <a:t>📚 SGK</a:t>
+            </a:r>
+          </a:p>
+        </p:txBody>
+      </p:sp>
+      <p:sp>
+        <p:nvSpPr>
+          <p:cNvPr id="9" name="Rectangle 8"/>
           <p:cNvSpPr/>
           <p:nvPr/>
         </p:nvSpPr>
@@ -5456,7 +5717,7 @@
       </p:sp>
       <p:sp>
         <p:nvSpPr>
-          <p:cNvPr id="9" name="TextBox 8"/>
+          <p:cNvPr id="10" name="TextBox 9"/>
           <p:cNvSpPr txBox="1"/>
           <p:nvPr/>
         </p:nvSpPr>
@@ -5523,8 +5784,8 @@
         </p:nvSpPr>
         <p:spPr>
           <a:xfrm>
-            <a:off x="472440" y="1188720"/>
-            <a:ext cx="11247120" cy="4389120"/>
+            <a:off x="320040" y="1188720"/>
+            <a:ext cx="7315200" cy="4389120"/>
           </a:xfrm>
           <a:prstGeom prst="roundRect">
             <a:avLst>
@@ -5575,7 +5836,7 @@
         </p:nvSpPr>
         <p:spPr>
           <a:xfrm>
-            <a:off x="472440" y="1188720"/>
+            <a:off x="320040" y="1188720"/>
             <a:ext cx="109728" cy="4389120"/>
           </a:xfrm>
           <a:prstGeom prst="rect">
@@ -5618,8 +5879,8 @@
         </p:nvSpPr>
         <p:spPr>
           <a:xfrm>
-            <a:off x="929640" y="1371600"/>
-            <a:ext cx="10058400" cy="457200"/>
+            <a:off x="777240" y="1371600"/>
+            <a:ext cx="6400800" cy="457200"/>
           </a:xfrm>
           <a:prstGeom prst="rect">
             <a:avLst/>
@@ -5654,8 +5915,8 @@
         </p:nvSpPr>
         <p:spPr>
           <a:xfrm>
-            <a:off x="929640" y="2011680"/>
-            <a:ext cx="10058400" cy="3291840"/>
+            <a:off x="777240" y="2011680"/>
+            <a:ext cx="6400800" cy="3291840"/>
           </a:xfrm>
           <a:prstGeom prst="rect">
             <a:avLst/>
@@ -5781,9 +6042,33 @@
           </a:p>
         </p:txBody>
       </p:sp>
-      <p:sp>
-        <p:nvSpPr>
-          <p:cNvPr id="6" name="Rectangle 5"/>
+      <p:pic>
+        <p:nvPicPr>
+          <p:cNvPr id="6" name="Picture 5" descr="bai1_page9.png"/>
+          <p:cNvPicPr>
+            <a:picLocks noChangeAspect="1"/>
+          </p:cNvPicPr>
+          <p:nvPr/>
+        </p:nvPicPr>
+        <p:blipFill>
+          <a:blip r:embed="rId2"/>
+          <a:stretch>
+            <a:fillRect/>
+          </a:stretch>
+        </p:blipFill>
+        <p:spPr>
+          <a:xfrm>
+            <a:off x="8316039" y="1188720"/>
+            <a:ext cx="3103721" cy="4389120"/>
+          </a:xfrm>
+          <a:prstGeom prst="rect">
+            <a:avLst/>
+          </a:prstGeom>
+        </p:spPr>
+      </p:pic>
+      <p:sp>
+        <p:nvSpPr>
+          <p:cNvPr id="7" name="Rectangle 6"/>
           <p:cNvSpPr/>
           <p:nvPr/>
         </p:nvSpPr>
@@ -5826,7 +6111,7 @@
       </p:sp>
       <p:sp>
         <p:nvSpPr>
-          <p:cNvPr id="7" name="TextBox 6"/>
+          <p:cNvPr id="8" name="TextBox 7"/>
           <p:cNvSpPr txBox="1"/>
           <p:nvPr/>
         </p:nvSpPr>
@@ -5885,9 +6170,78 @@
         <p:nvPr/>
       </p:nvGrpSpPr>
       <p:grpSpPr/>
-      <p:sp>
-        <p:nvSpPr>
-          <p:cNvPr id="2" name="Rounded Rectangle 1"/>
+      <p:pic>
+        <p:nvPicPr>
+          <p:cNvPr id="2" name="Picture 1" descr="bai1_page11.png"/>
+          <p:cNvPicPr>
+            <a:picLocks noChangeAspect="1"/>
+          </p:cNvPicPr>
+          <p:nvPr/>
+        </p:nvPicPr>
+        <p:blipFill>
+          <a:blip r:embed="rId2"/>
+          <a:stretch>
+            <a:fillRect/>
+          </a:stretch>
+        </p:blipFill>
+        <p:spPr>
+          <a:xfrm>
+            <a:off x="7993931" y="1371600"/>
+            <a:ext cx="2909738" cy="4114800"/>
+          </a:xfrm>
+          <a:prstGeom prst="rect">
+            <a:avLst/>
+          </a:prstGeom>
+        </p:spPr>
+      </p:pic>
+      <p:sp>
+        <p:nvSpPr>
+          <p:cNvPr id="3" name="Rectangle 2"/>
+          <p:cNvSpPr/>
+          <p:nvPr/>
+        </p:nvSpPr>
+        <p:spPr>
+          <a:xfrm>
+            <a:off x="7162800" y="1371600"/>
+            <a:ext cx="4572000" cy="4114800"/>
+          </a:xfrm>
+          <a:prstGeom prst="rect">
+            <a:avLst/>
+          </a:prstGeom>
+          <a:solidFill>
+            <a:srgbClr val="00797B">
+              <a:alpha val="50000"/>
+            </a:srgbClr>
+          </a:solidFill>
+          <a:ln>
+            <a:noFill/>
+          </a:ln>
+        </p:spPr>
+        <p:style>
+          <a:lnRef idx="1">
+            <a:schemeClr val="accent1"/>
+          </a:lnRef>
+          <a:fillRef idx="3">
+            <a:schemeClr val="accent1"/>
+          </a:fillRef>
+          <a:effectRef idx="2">
+            <a:schemeClr val="accent1"/>
+          </a:effectRef>
+          <a:fontRef idx="minor">
+            <a:schemeClr val="lt1"/>
+          </a:fontRef>
+        </p:style>
+        <p:txBody>
+          <a:bodyPr rtlCol="0" anchor="ctr"/>
+          <a:lstStyle/>
+          <a:p>
+            <a:pPr algn="ctr"/>
+          </a:p>
+        </p:txBody>
+      </p:sp>
+      <p:sp>
+        <p:nvSpPr>
+          <p:cNvPr id="4" name="Rounded Rectangle 3"/>
           <p:cNvSpPr/>
           <p:nvPr/>
         </p:nvSpPr>
@@ -5932,7 +6286,7 @@
       </p:sp>
       <p:sp>
         <p:nvSpPr>
-          <p:cNvPr id="3" name="TextBox 2"/>
+          <p:cNvPr id="5" name="TextBox 4"/>
           <p:cNvSpPr txBox="1"/>
           <p:nvPr/>
         </p:nvSpPr>
@@ -5983,7 +6337,7 @@
       </p:sp>
       <p:sp>
         <p:nvSpPr>
-          <p:cNvPr id="4" name="TextBox 3"/>
+          <p:cNvPr id="6" name="TextBox 5"/>
           <p:cNvSpPr txBox="1"/>
           <p:nvPr/>
         </p:nvSpPr>
@@ -6018,7 +6372,7 @@
       </p:sp>
       <p:sp>
         <p:nvSpPr>
-          <p:cNvPr id="5" name="Rectangle 4"/>
+          <p:cNvPr id="7" name="Rectangle 6"/>
           <p:cNvSpPr/>
           <p:nvPr/>
         </p:nvSpPr>
@@ -6061,7 +6415,7 @@
       </p:sp>
       <p:sp>
         <p:nvSpPr>
-          <p:cNvPr id="6" name="TextBox 5"/>
+          <p:cNvPr id="8" name="TextBox 7"/>
           <p:cNvSpPr txBox="1"/>
           <p:nvPr/>
         </p:nvSpPr>
